--- a/public/fun/pack/pptx/familypro/가족소개프리미엄_25_반려동물과함께_선셋로즈.pptx
+++ b/public/fun/pack/pptx/familypro/가족소개프리미엄_25_반려동물과함께_선셋로즈.pptx
@@ -113,12 +113,12 @@
   <p:extLst>
     <p:ext uri="{521415D9-36F7-43E2-AB2F-B90AF26B5E84}">
       <p14:sectionLst xmlns:p14="http://schemas.microsoft.com/office/powerpoint/2010/main">
-        <p14:section name="시작" id="{9721D38E-0F32-40E7-98FF-746C4656F82C}">
+        <p14:section name="시작" id="{78FFBDE9-7B73-4F4E-BFC3-E4461743C3A4}">
           <p14:sldIdLst>
             <p14:sldId id="256"/>
           </p14:sldIdLst>
         </p14:section>
-        <p14:section name="본문" id="{6DE69519-1C28-43FA-8757-A60AE33B8F6C}">
+        <p14:section name="본문" id="{FA59F0F7-EFE8-458B-B2B2-9562441488E6}">
           <p14:sldIdLst>
             <p14:sldId id="257"/>
             <p14:sldId id="258"/>
@@ -127,7 +127,7 @@
             <p14:sldId id="261"/>
           </p14:sldIdLst>
         </p14:section>
-        <p14:section name="마무리" id="{1D5B053E-6842-47CA-B391-5132C00F74D4}">
+        <p14:section name="마무리" id="{2EECF241-6F82-4FE3-A591-E0AA2BD003D9}">
           <p14:sldIdLst>
             <p14:sldId id="262"/>
           </p14:sldIdLst>
@@ -1664,7 +1664,7 @@
             </a:lvl1pPr>
           </a:lstStyle>
           <a:p>
-            <a:fld id="{C1D7FDCF-DA25-49D7-BCFD-CBC920BC9042}" type="slidenum">
+            <a:fld id="{BD43A5F2-2BA9-4560-8937-DFA5A7664FCE}" type="slidenum">
               <a:rPr lang="en-US"/>
               <a:t>‹#›</a:t>
             </a:fld>
@@ -2790,7 +2790,7 @@
             </a:lvl1pPr>
           </a:lstStyle>
           <a:p>
-            <a:fld id="{6911FB9D-3091-4324-A6F6-0DDD752DFF5B}" type="slidenum">
+            <a:fld id="{E8A2711C-5D1E-45BD-8C9F-F5797B9D67FD}" type="slidenum">
               <a:rPr lang="en-US"/>
               <a:t>‹#›</a:t>
             </a:fld>
@@ -3800,7 +3800,7 @@
             </a:lvl1pPr>
           </a:lstStyle>
           <a:p>
-            <a:fld id="{3255CE83-951E-421D-A004-738F9592AC99}" type="slidenum">
+            <a:fld id="{DE183A80-87A7-4E44-94DF-98D8F60FDFB8}" type="slidenum">
               <a:rPr lang="en-US"/>
               <a:t>‹#›</a:t>
             </a:fld>
@@ -4963,7 +4963,7 @@
           <a:p>
             <a:r>
               <a:rPr lang="ko-KR"/>
-              <a:t>반려동물과 함께 · 0000. 00. 00</a:t>
+              <a:t>반려동물과 함께 · 날짜 입력</a:t>
             </a:r>
           </a:p>
         </p:txBody>
@@ -5255,7 +5255,7 @@
           <a:bodyPr/>
           <a:lstStyle/>
           <a:p>
-            <a:fld id="{549C2C9A-20EF-4F86-8D69-6D4F287C4116}" type="slidenum">
+            <a:fld id="{9F007426-DE2C-4E10-AAB1-B8FE4AAFC888}" type="slidenum">
               <a:rPr lang="en-US"/>
               <a:t>‹#›</a:t>
             </a:fld>
@@ -5823,7 +5823,7 @@
           <a:bodyPr/>
           <a:lstStyle/>
           <a:p>
-            <a:fld id="{7C70C74F-5D59-4983-99BD-E275E4818892}" type="slidenum">
+            <a:fld id="{31AF30E1-F95B-4480-BC53-3E07923AED6B}" type="slidenum">
               <a:rPr lang="en-US"/>
               <a:t>‹#›</a:t>
             </a:fld>
@@ -6665,7 +6665,7 @@
           <a:bodyPr/>
           <a:lstStyle/>
           <a:p>
-            <a:fld id="{27992921-AE2C-4E8E-AB81-FD28B2BEA80C}" type="slidenum">
+            <a:fld id="{2AF4CB87-FFD5-4494-829A-2EFF986C86BC}" type="slidenum">
               <a:rPr lang="en-US"/>
               <a:t>‹#›</a:t>
             </a:fld>
@@ -7947,7 +7947,7 @@
           <a:bodyPr/>
           <a:lstStyle/>
           <a:p>
-            <a:fld id="{34BC3139-6389-4577-B52C-B86EB0331BA3}" type="slidenum">
+            <a:fld id="{A25CD6C3-F0AF-4F4C-800E-34FEF8D4D635}" type="slidenum">
               <a:rPr lang="en-US"/>
               <a:t>‹#›</a:t>
             </a:fld>
@@ -8035,7 +8035,7 @@
           <a:bodyPr/>
           <a:lstStyle/>
           <a:p>
-            <a:fld id="{122342A0-680C-4F6D-9750-F30895B2F9B1}" type="slidenum">
+            <a:fld id="{58E4C3F8-278B-43DC-BDE3-B71BF26CA370}" type="slidenum">
               <a:rPr lang="en-US"/>
               <a:t>‹#›</a:t>
             </a:fld>
